--- a/LLM_and_Enterprise_RAG_Bootcamp/Slides/Week_06_prompts.pptx
+++ b/LLM_and_Enterprise_RAG_Bootcamp/Slides/Week_06_prompts.pptx
@@ -3304,7 +3304,7 @@
         </p:nvSpPr>
         <p:spPr>
           <a:xfrm>
-            <a:off x="548640" y="6035040"/>
+            <a:off x="548640" y="5760720"/>
             <a:ext cx="7315200" cy="365760"/>
           </a:xfrm>
           <a:prstGeom prst="rect">
@@ -3326,7 +3326,7 @@
                 </a:solidFill>
                 <a:latin typeface="Calibri"/>
               </a:rPr>
-              <a:t>Saturday, July 11, 2026</a:t>
+              <a:t>Saturday, November 7, 2026</a:t>
             </a:r>
           </a:p>
         </p:txBody>
@@ -3339,7 +3339,7 @@
         </p:nvSpPr>
         <p:spPr>
           <a:xfrm>
-            <a:off x="548640" y="6400800"/>
+            <a:off x="548640" y="6126480"/>
             <a:ext cx="9144000" cy="365760"/>
           </a:xfrm>
           <a:prstGeom prst="rect">
@@ -3362,6 +3362,41 @@
                 <a:latin typeface="Calibri"/>
               </a:rPr>
               <a:t>LLM and Enterprise RAG Bootcamp | Instructor: Pavan R</a:t>
+            </a:r>
+          </a:p>
+        </p:txBody>
+      </p:sp>
+      <p:sp>
+        <p:nvSpPr>
+          <p:cNvPr id="9" name="TextBox 8"/>
+          <p:cNvSpPr txBox="1"/>
+          <p:nvPr/>
+        </p:nvSpPr>
+        <p:spPr>
+          <a:xfrm>
+            <a:off x="457200" y="6620256"/>
+            <a:ext cx="11247120" cy="201168"/>
+          </a:xfrm>
+          <a:prstGeom prst="rect">
+            <a:avLst/>
+          </a:prstGeom>
+          <a:noFill/>
+        </p:spPr>
+        <p:txBody>
+          <a:bodyPr wrap="square">
+            <a:spAutoFit/>
+          </a:bodyPr>
+          <a:lstStyle/>
+          <a:p>
+            <a:pPr algn="ctr"/>
+            <a:r>
+              <a:rPr sz="800" b="0">
+                <a:solidFill>
+                  <a:srgbClr val="FFFFFF"/>
+                </a:solidFill>
+                <a:latin typeface="Calibri"/>
+              </a:rPr>
+              <a:t>© 2026 Proxiant Academy | info@proxiant.com | proxiant.ai/training</a:t>
             </a:r>
           </a:p>
         </p:txBody>
@@ -3579,6 +3614,41 @@
           </a:p>
         </p:txBody>
       </p:sp>
+      <p:sp>
+        <p:nvSpPr>
+          <p:cNvPr id="7" name="TextBox 6"/>
+          <p:cNvSpPr txBox="1"/>
+          <p:nvPr/>
+        </p:nvSpPr>
+        <p:spPr>
+          <a:xfrm>
+            <a:off x="457200" y="6620256"/>
+            <a:ext cx="11247120" cy="201168"/>
+          </a:xfrm>
+          <a:prstGeom prst="rect">
+            <a:avLst/>
+          </a:prstGeom>
+          <a:noFill/>
+        </p:spPr>
+        <p:txBody>
+          <a:bodyPr wrap="square">
+            <a:spAutoFit/>
+          </a:bodyPr>
+          <a:lstStyle/>
+          <a:p>
+            <a:pPr algn="ctr"/>
+            <a:r>
+              <a:rPr sz="800" b="0">
+                <a:solidFill>
+                  <a:srgbClr val="FFFFFF"/>
+                </a:solidFill>
+                <a:latin typeface="Calibri"/>
+              </a:rPr>
+              <a:t>© 2026 Proxiant Academy | info@proxiant.com | proxiant.ai/training</a:t>
+            </a:r>
+          </a:p>
+        </p:txBody>
+      </p:sp>
     </p:spTree>
   </p:cSld>
   <p:clrMapOvr>
@@ -3792,6 +3862,41 @@
           </a:p>
         </p:txBody>
       </p:sp>
+      <p:sp>
+        <p:nvSpPr>
+          <p:cNvPr id="7" name="TextBox 6"/>
+          <p:cNvSpPr txBox="1"/>
+          <p:nvPr/>
+        </p:nvSpPr>
+        <p:spPr>
+          <a:xfrm>
+            <a:off x="457200" y="6620256"/>
+            <a:ext cx="11247120" cy="201168"/>
+          </a:xfrm>
+          <a:prstGeom prst="rect">
+            <a:avLst/>
+          </a:prstGeom>
+          <a:noFill/>
+        </p:spPr>
+        <p:txBody>
+          <a:bodyPr wrap="square">
+            <a:spAutoFit/>
+          </a:bodyPr>
+          <a:lstStyle/>
+          <a:p>
+            <a:pPr algn="ctr"/>
+            <a:r>
+              <a:rPr sz="800" b="0">
+                <a:solidFill>
+                  <a:srgbClr val="FFFFFF"/>
+                </a:solidFill>
+                <a:latin typeface="Calibri"/>
+              </a:rPr>
+              <a:t>© 2026 Proxiant Academy | info@proxiant.com | proxiant.ai/training</a:t>
+            </a:r>
+          </a:p>
+        </p:txBody>
+      </p:sp>
     </p:spTree>
   </p:cSld>
   <p:clrMapOvr>
@@ -4005,6 +4110,41 @@
           </a:p>
         </p:txBody>
       </p:sp>
+      <p:sp>
+        <p:nvSpPr>
+          <p:cNvPr id="7" name="TextBox 6"/>
+          <p:cNvSpPr txBox="1"/>
+          <p:nvPr/>
+        </p:nvSpPr>
+        <p:spPr>
+          <a:xfrm>
+            <a:off x="457200" y="6620256"/>
+            <a:ext cx="11247120" cy="201168"/>
+          </a:xfrm>
+          <a:prstGeom prst="rect">
+            <a:avLst/>
+          </a:prstGeom>
+          <a:noFill/>
+        </p:spPr>
+        <p:txBody>
+          <a:bodyPr wrap="square">
+            <a:spAutoFit/>
+          </a:bodyPr>
+          <a:lstStyle/>
+          <a:p>
+            <a:pPr algn="ctr"/>
+            <a:r>
+              <a:rPr sz="800" b="0">
+                <a:solidFill>
+                  <a:srgbClr val="FFFFFF"/>
+                </a:solidFill>
+                <a:latin typeface="Calibri"/>
+              </a:rPr>
+              <a:t>© 2026 Proxiant Academy | info@proxiant.com | proxiant.ai/training</a:t>
+            </a:r>
+          </a:p>
+        </p:txBody>
+      </p:sp>
     </p:spTree>
   </p:cSld>
   <p:clrMapOvr>
@@ -4179,6 +4319,41 @@
           </a:p>
         </p:txBody>
       </p:sp>
+      <p:sp>
+        <p:nvSpPr>
+          <p:cNvPr id="6" name="TextBox 5"/>
+          <p:cNvSpPr txBox="1"/>
+          <p:nvPr/>
+        </p:nvSpPr>
+        <p:spPr>
+          <a:xfrm>
+            <a:off x="457200" y="6620256"/>
+            <a:ext cx="11247120" cy="201168"/>
+          </a:xfrm>
+          <a:prstGeom prst="rect">
+            <a:avLst/>
+          </a:prstGeom>
+          <a:noFill/>
+        </p:spPr>
+        <p:txBody>
+          <a:bodyPr wrap="square">
+            <a:spAutoFit/>
+          </a:bodyPr>
+          <a:lstStyle/>
+          <a:p>
+            <a:pPr algn="ctr"/>
+            <a:r>
+              <a:rPr sz="800" b="0">
+                <a:solidFill>
+                  <a:srgbClr val="1E2761"/>
+                </a:solidFill>
+                <a:latin typeface="Calibri"/>
+              </a:rPr>
+              <a:t>© 2026 Proxiant Academy | info@proxiant.com | proxiant.ai/training</a:t>
+            </a:r>
+          </a:p>
+        </p:txBody>
+      </p:sp>
     </p:spTree>
   </p:cSld>
   <p:clrMapOvr>
@@ -4392,6 +4567,41 @@
           </a:p>
         </p:txBody>
       </p:sp>
+      <p:sp>
+        <p:nvSpPr>
+          <p:cNvPr id="7" name="TextBox 6"/>
+          <p:cNvSpPr txBox="1"/>
+          <p:nvPr/>
+        </p:nvSpPr>
+        <p:spPr>
+          <a:xfrm>
+            <a:off x="457200" y="6620256"/>
+            <a:ext cx="11247120" cy="201168"/>
+          </a:xfrm>
+          <a:prstGeom prst="rect">
+            <a:avLst/>
+          </a:prstGeom>
+          <a:noFill/>
+        </p:spPr>
+        <p:txBody>
+          <a:bodyPr wrap="square">
+            <a:spAutoFit/>
+          </a:bodyPr>
+          <a:lstStyle/>
+          <a:p>
+            <a:pPr algn="ctr"/>
+            <a:r>
+              <a:rPr sz="800" b="0">
+                <a:solidFill>
+                  <a:srgbClr val="FFFFFF"/>
+                </a:solidFill>
+                <a:latin typeface="Calibri"/>
+              </a:rPr>
+              <a:t>© 2026 Proxiant Academy | info@proxiant.com | proxiant.ai/training</a:t>
+            </a:r>
+          </a:p>
+        </p:txBody>
+      </p:sp>
     </p:spTree>
   </p:cSld>
   <p:clrMapOvr>
@@ -4605,6 +4815,41 @@
           </a:p>
         </p:txBody>
       </p:sp>
+      <p:sp>
+        <p:nvSpPr>
+          <p:cNvPr id="7" name="TextBox 6"/>
+          <p:cNvSpPr txBox="1"/>
+          <p:nvPr/>
+        </p:nvSpPr>
+        <p:spPr>
+          <a:xfrm>
+            <a:off x="457200" y="6620256"/>
+            <a:ext cx="11247120" cy="201168"/>
+          </a:xfrm>
+          <a:prstGeom prst="rect">
+            <a:avLst/>
+          </a:prstGeom>
+          <a:noFill/>
+        </p:spPr>
+        <p:txBody>
+          <a:bodyPr wrap="square">
+            <a:spAutoFit/>
+          </a:bodyPr>
+          <a:lstStyle/>
+          <a:p>
+            <a:pPr algn="ctr"/>
+            <a:r>
+              <a:rPr sz="800" b="0">
+                <a:solidFill>
+                  <a:srgbClr val="FFFFFF"/>
+                </a:solidFill>
+                <a:latin typeface="Calibri"/>
+              </a:rPr>
+              <a:t>© 2026 Proxiant Academy | info@proxiant.com | proxiant.ai/training</a:t>
+            </a:r>
+          </a:p>
+        </p:txBody>
+      </p:sp>
     </p:spTree>
   </p:cSld>
   <p:clrMapOvr>
@@ -4818,6 +5063,41 @@
           </a:p>
         </p:txBody>
       </p:sp>
+      <p:sp>
+        <p:nvSpPr>
+          <p:cNvPr id="7" name="TextBox 6"/>
+          <p:cNvSpPr txBox="1"/>
+          <p:nvPr/>
+        </p:nvSpPr>
+        <p:spPr>
+          <a:xfrm>
+            <a:off x="457200" y="6620256"/>
+            <a:ext cx="11247120" cy="201168"/>
+          </a:xfrm>
+          <a:prstGeom prst="rect">
+            <a:avLst/>
+          </a:prstGeom>
+          <a:noFill/>
+        </p:spPr>
+        <p:txBody>
+          <a:bodyPr wrap="square">
+            <a:spAutoFit/>
+          </a:bodyPr>
+          <a:lstStyle/>
+          <a:p>
+            <a:pPr algn="ctr"/>
+            <a:r>
+              <a:rPr sz="800" b="0">
+                <a:solidFill>
+                  <a:srgbClr val="FFFFFF"/>
+                </a:solidFill>
+                <a:latin typeface="Calibri"/>
+              </a:rPr>
+              <a:t>© 2026 Proxiant Academy | info@proxiant.com | proxiant.ai/training</a:t>
+            </a:r>
+          </a:p>
+        </p:txBody>
+      </p:sp>
     </p:spTree>
   </p:cSld>
   <p:clrMapOvr>
@@ -5031,6 +5311,41 @@
           </a:p>
         </p:txBody>
       </p:sp>
+      <p:sp>
+        <p:nvSpPr>
+          <p:cNvPr id="7" name="TextBox 6"/>
+          <p:cNvSpPr txBox="1"/>
+          <p:nvPr/>
+        </p:nvSpPr>
+        <p:spPr>
+          <a:xfrm>
+            <a:off x="457200" y="6620256"/>
+            <a:ext cx="11247120" cy="201168"/>
+          </a:xfrm>
+          <a:prstGeom prst="rect">
+            <a:avLst/>
+          </a:prstGeom>
+          <a:noFill/>
+        </p:spPr>
+        <p:txBody>
+          <a:bodyPr wrap="square">
+            <a:spAutoFit/>
+          </a:bodyPr>
+          <a:lstStyle/>
+          <a:p>
+            <a:pPr algn="ctr"/>
+            <a:r>
+              <a:rPr sz="800" b="0">
+                <a:solidFill>
+                  <a:srgbClr val="FFFFFF"/>
+                </a:solidFill>
+                <a:latin typeface="Calibri"/>
+              </a:rPr>
+              <a:t>© 2026 Proxiant Academy | info@proxiant.com | proxiant.ai/training</a:t>
+            </a:r>
+          </a:p>
+        </p:txBody>
+      </p:sp>
     </p:spTree>
   </p:cSld>
   <p:clrMapOvr>
@@ -5405,6 +5720,41 @@
           </a:p>
         </p:txBody>
       </p:sp>
+      <p:sp>
+        <p:nvSpPr>
+          <p:cNvPr id="7" name="TextBox 6"/>
+          <p:cNvSpPr txBox="1"/>
+          <p:nvPr/>
+        </p:nvSpPr>
+        <p:spPr>
+          <a:xfrm>
+            <a:off x="457200" y="6620256"/>
+            <a:ext cx="11247120" cy="201168"/>
+          </a:xfrm>
+          <a:prstGeom prst="rect">
+            <a:avLst/>
+          </a:prstGeom>
+          <a:noFill/>
+        </p:spPr>
+        <p:txBody>
+          <a:bodyPr wrap="square">
+            <a:spAutoFit/>
+          </a:bodyPr>
+          <a:lstStyle/>
+          <a:p>
+            <a:pPr algn="ctr"/>
+            <a:r>
+              <a:rPr sz="800" b="0">
+                <a:solidFill>
+                  <a:srgbClr val="FFFFFF"/>
+                </a:solidFill>
+                <a:latin typeface="Calibri"/>
+              </a:rPr>
+              <a:t>© 2026 Proxiant Academy | info@proxiant.com | proxiant.ai/training</a:t>
+            </a:r>
+          </a:p>
+        </p:txBody>
+      </p:sp>
     </p:spTree>
   </p:cSld>
   <p:clrMapOvr>
@@ -5618,6 +5968,41 @@
           </a:p>
         </p:txBody>
       </p:sp>
+      <p:sp>
+        <p:nvSpPr>
+          <p:cNvPr id="7" name="TextBox 6"/>
+          <p:cNvSpPr txBox="1"/>
+          <p:nvPr/>
+        </p:nvSpPr>
+        <p:spPr>
+          <a:xfrm>
+            <a:off x="457200" y="6620256"/>
+            <a:ext cx="11247120" cy="201168"/>
+          </a:xfrm>
+          <a:prstGeom prst="rect">
+            <a:avLst/>
+          </a:prstGeom>
+          <a:noFill/>
+        </p:spPr>
+        <p:txBody>
+          <a:bodyPr wrap="square">
+            <a:spAutoFit/>
+          </a:bodyPr>
+          <a:lstStyle/>
+          <a:p>
+            <a:pPr algn="ctr"/>
+            <a:r>
+              <a:rPr sz="800" b="0">
+                <a:solidFill>
+                  <a:srgbClr val="FFFFFF"/>
+                </a:solidFill>
+                <a:latin typeface="Calibri"/>
+              </a:rPr>
+              <a:t>© 2026 Proxiant Academy | info@proxiant.com | proxiant.ai/training</a:t>
+            </a:r>
+          </a:p>
+        </p:txBody>
+      </p:sp>
     </p:spTree>
   </p:cSld>
   <p:clrMapOvr>
@@ -5792,6 +6177,41 @@
           </a:p>
         </p:txBody>
       </p:sp>
+      <p:sp>
+        <p:nvSpPr>
+          <p:cNvPr id="6" name="TextBox 5"/>
+          <p:cNvSpPr txBox="1"/>
+          <p:nvPr/>
+        </p:nvSpPr>
+        <p:spPr>
+          <a:xfrm>
+            <a:off x="457200" y="6620256"/>
+            <a:ext cx="11247120" cy="201168"/>
+          </a:xfrm>
+          <a:prstGeom prst="rect">
+            <a:avLst/>
+          </a:prstGeom>
+          <a:noFill/>
+        </p:spPr>
+        <p:txBody>
+          <a:bodyPr wrap="square">
+            <a:spAutoFit/>
+          </a:bodyPr>
+          <a:lstStyle/>
+          <a:p>
+            <a:pPr algn="ctr"/>
+            <a:r>
+              <a:rPr sz="800" b="0">
+                <a:solidFill>
+                  <a:srgbClr val="1E2761"/>
+                </a:solidFill>
+                <a:latin typeface="Calibri"/>
+              </a:rPr>
+              <a:t>© 2026 Proxiant Academy | info@proxiant.com | proxiant.ai/training</a:t>
+            </a:r>
+          </a:p>
+        </p:txBody>
+      </p:sp>
     </p:spTree>
   </p:cSld>
   <p:clrMapOvr>
@@ -6005,6 +6425,41 @@
           </a:p>
         </p:txBody>
       </p:sp>
+      <p:sp>
+        <p:nvSpPr>
+          <p:cNvPr id="7" name="TextBox 6"/>
+          <p:cNvSpPr txBox="1"/>
+          <p:nvPr/>
+        </p:nvSpPr>
+        <p:spPr>
+          <a:xfrm>
+            <a:off x="457200" y="6620256"/>
+            <a:ext cx="11247120" cy="201168"/>
+          </a:xfrm>
+          <a:prstGeom prst="rect">
+            <a:avLst/>
+          </a:prstGeom>
+          <a:noFill/>
+        </p:spPr>
+        <p:txBody>
+          <a:bodyPr wrap="square">
+            <a:spAutoFit/>
+          </a:bodyPr>
+          <a:lstStyle/>
+          <a:p>
+            <a:pPr algn="ctr"/>
+            <a:r>
+              <a:rPr sz="800" b="0">
+                <a:solidFill>
+                  <a:srgbClr val="FFFFFF"/>
+                </a:solidFill>
+                <a:latin typeface="Calibri"/>
+              </a:rPr>
+              <a:t>© 2026 Proxiant Academy | info@proxiant.com | proxiant.ai/training</a:t>
+            </a:r>
+          </a:p>
+        </p:txBody>
+      </p:sp>
     </p:spTree>
   </p:cSld>
   <p:clrMapOvr>
@@ -6179,6 +6634,41 @@
           </a:p>
         </p:txBody>
       </p:sp>
+      <p:sp>
+        <p:nvSpPr>
+          <p:cNvPr id="6" name="TextBox 5"/>
+          <p:cNvSpPr txBox="1"/>
+          <p:nvPr/>
+        </p:nvSpPr>
+        <p:spPr>
+          <a:xfrm>
+            <a:off x="457200" y="6620256"/>
+            <a:ext cx="11247120" cy="201168"/>
+          </a:xfrm>
+          <a:prstGeom prst="rect">
+            <a:avLst/>
+          </a:prstGeom>
+          <a:noFill/>
+        </p:spPr>
+        <p:txBody>
+          <a:bodyPr wrap="square">
+            <a:spAutoFit/>
+          </a:bodyPr>
+          <a:lstStyle/>
+          <a:p>
+            <a:pPr algn="ctr"/>
+            <a:r>
+              <a:rPr sz="800" b="0">
+                <a:solidFill>
+                  <a:srgbClr val="1E2761"/>
+                </a:solidFill>
+                <a:latin typeface="Calibri"/>
+              </a:rPr>
+              <a:t>© 2026 Proxiant Academy | info@proxiant.com | proxiant.ai/training</a:t>
+            </a:r>
+          </a:p>
+        </p:txBody>
+      </p:sp>
     </p:spTree>
   </p:cSld>
   <p:clrMapOvr>
@@ -6392,6 +6882,41 @@
           </a:p>
         </p:txBody>
       </p:sp>
+      <p:sp>
+        <p:nvSpPr>
+          <p:cNvPr id="7" name="TextBox 6"/>
+          <p:cNvSpPr txBox="1"/>
+          <p:nvPr/>
+        </p:nvSpPr>
+        <p:spPr>
+          <a:xfrm>
+            <a:off x="457200" y="6620256"/>
+            <a:ext cx="11247120" cy="201168"/>
+          </a:xfrm>
+          <a:prstGeom prst="rect">
+            <a:avLst/>
+          </a:prstGeom>
+          <a:noFill/>
+        </p:spPr>
+        <p:txBody>
+          <a:bodyPr wrap="square">
+            <a:spAutoFit/>
+          </a:bodyPr>
+          <a:lstStyle/>
+          <a:p>
+            <a:pPr algn="ctr"/>
+            <a:r>
+              <a:rPr sz="800" b="0">
+                <a:solidFill>
+                  <a:srgbClr val="FFFFFF"/>
+                </a:solidFill>
+                <a:latin typeface="Calibri"/>
+              </a:rPr>
+              <a:t>© 2026 Proxiant Academy | info@proxiant.com | proxiant.ai/training</a:t>
+            </a:r>
+          </a:p>
+        </p:txBody>
+      </p:sp>
     </p:spTree>
   </p:cSld>
   <p:clrMapOvr>
@@ -6605,6 +7130,41 @@
           </a:p>
         </p:txBody>
       </p:sp>
+      <p:sp>
+        <p:nvSpPr>
+          <p:cNvPr id="7" name="TextBox 6"/>
+          <p:cNvSpPr txBox="1"/>
+          <p:nvPr/>
+        </p:nvSpPr>
+        <p:spPr>
+          <a:xfrm>
+            <a:off x="457200" y="6620256"/>
+            <a:ext cx="11247120" cy="201168"/>
+          </a:xfrm>
+          <a:prstGeom prst="rect">
+            <a:avLst/>
+          </a:prstGeom>
+          <a:noFill/>
+        </p:spPr>
+        <p:txBody>
+          <a:bodyPr wrap="square">
+            <a:spAutoFit/>
+          </a:bodyPr>
+          <a:lstStyle/>
+          <a:p>
+            <a:pPr algn="ctr"/>
+            <a:r>
+              <a:rPr sz="800" b="0">
+                <a:solidFill>
+                  <a:srgbClr val="FFFFFF"/>
+                </a:solidFill>
+                <a:latin typeface="Calibri"/>
+              </a:rPr>
+              <a:t>© 2026 Proxiant Academy | info@proxiant.com | proxiant.ai/training</a:t>
+            </a:r>
+          </a:p>
+        </p:txBody>
+      </p:sp>
     </p:spTree>
   </p:cSld>
   <p:clrMapOvr>
@@ -6779,6 +7339,41 @@
           </a:p>
         </p:txBody>
       </p:sp>
+      <p:sp>
+        <p:nvSpPr>
+          <p:cNvPr id="6" name="TextBox 5"/>
+          <p:cNvSpPr txBox="1"/>
+          <p:nvPr/>
+        </p:nvSpPr>
+        <p:spPr>
+          <a:xfrm>
+            <a:off x="457200" y="6620256"/>
+            <a:ext cx="11247120" cy="201168"/>
+          </a:xfrm>
+          <a:prstGeom prst="rect">
+            <a:avLst/>
+          </a:prstGeom>
+          <a:noFill/>
+        </p:spPr>
+        <p:txBody>
+          <a:bodyPr wrap="square">
+            <a:spAutoFit/>
+          </a:bodyPr>
+          <a:lstStyle/>
+          <a:p>
+            <a:pPr algn="ctr"/>
+            <a:r>
+              <a:rPr sz="800" b="0">
+                <a:solidFill>
+                  <a:srgbClr val="1E2761"/>
+                </a:solidFill>
+                <a:latin typeface="Calibri"/>
+              </a:rPr>
+              <a:t>© 2026 Proxiant Academy | info@proxiant.com | proxiant.ai/training</a:t>
+            </a:r>
+          </a:p>
+        </p:txBody>
+      </p:sp>
     </p:spTree>
   </p:cSld>
   <p:clrMapOvr>
@@ -7040,6 +7635,41 @@
           </a:p>
         </p:txBody>
       </p:sp>
+      <p:sp>
+        <p:nvSpPr>
+          <p:cNvPr id="7" name="TextBox 6"/>
+          <p:cNvSpPr txBox="1"/>
+          <p:nvPr/>
+        </p:nvSpPr>
+        <p:spPr>
+          <a:xfrm>
+            <a:off x="457200" y="6620256"/>
+            <a:ext cx="11247120" cy="201168"/>
+          </a:xfrm>
+          <a:prstGeom prst="rect">
+            <a:avLst/>
+          </a:prstGeom>
+          <a:noFill/>
+        </p:spPr>
+        <p:txBody>
+          <a:bodyPr wrap="square">
+            <a:spAutoFit/>
+          </a:bodyPr>
+          <a:lstStyle/>
+          <a:p>
+            <a:pPr algn="ctr"/>
+            <a:r>
+              <a:rPr sz="800" b="0">
+                <a:solidFill>
+                  <a:srgbClr val="FFFFFF"/>
+                </a:solidFill>
+                <a:latin typeface="Calibri"/>
+              </a:rPr>
+              <a:t>© 2026 Proxiant Academy | info@proxiant.com | proxiant.ai/training</a:t>
+            </a:r>
+          </a:p>
+        </p:txBody>
+      </p:sp>
     </p:spTree>
   </p:cSld>
   <p:clrMapOvr>
@@ -7284,7 +7914,7 @@
         </p:nvSpPr>
         <p:spPr>
           <a:xfrm>
-            <a:off x="640080" y="6400800"/>
+            <a:off x="640080" y="6217920"/>
             <a:ext cx="10972800" cy="365760"/>
           </a:xfrm>
           <a:prstGeom prst="rect">
@@ -7307,6 +7937,41 @@
                 <a:latin typeface="Calibri"/>
               </a:rPr>
               <a:t>Quiz Tuesday | Project due next Saturday | Instructor: Pavan R</a:t>
+            </a:r>
+          </a:p>
+        </p:txBody>
+      </p:sp>
+      <p:sp>
+        <p:nvSpPr>
+          <p:cNvPr id="9" name="TextBox 8"/>
+          <p:cNvSpPr txBox="1"/>
+          <p:nvPr/>
+        </p:nvSpPr>
+        <p:spPr>
+          <a:xfrm>
+            <a:off x="457200" y="6620256"/>
+            <a:ext cx="11247120" cy="201168"/>
+          </a:xfrm>
+          <a:prstGeom prst="rect">
+            <a:avLst/>
+          </a:prstGeom>
+          <a:noFill/>
+        </p:spPr>
+        <p:txBody>
+          <a:bodyPr wrap="square">
+            <a:spAutoFit/>
+          </a:bodyPr>
+          <a:lstStyle/>
+          <a:p>
+            <a:pPr algn="ctr"/>
+            <a:r>
+              <a:rPr sz="800" b="0">
+                <a:solidFill>
+                  <a:srgbClr val="FFFFFF"/>
+                </a:solidFill>
+                <a:latin typeface="Calibri"/>
+              </a:rPr>
+              <a:t>© 2026 Proxiant Academy | info@proxiant.com | proxiant.ai/training</a:t>
             </a:r>
           </a:p>
         </p:txBody>
@@ -7524,6 +8189,41 @@
           </a:p>
         </p:txBody>
       </p:sp>
+      <p:sp>
+        <p:nvSpPr>
+          <p:cNvPr id="7" name="TextBox 6"/>
+          <p:cNvSpPr txBox="1"/>
+          <p:nvPr/>
+        </p:nvSpPr>
+        <p:spPr>
+          <a:xfrm>
+            <a:off x="457200" y="6620256"/>
+            <a:ext cx="11247120" cy="201168"/>
+          </a:xfrm>
+          <a:prstGeom prst="rect">
+            <a:avLst/>
+          </a:prstGeom>
+          <a:noFill/>
+        </p:spPr>
+        <p:txBody>
+          <a:bodyPr wrap="square">
+            <a:spAutoFit/>
+          </a:bodyPr>
+          <a:lstStyle/>
+          <a:p>
+            <a:pPr algn="ctr"/>
+            <a:r>
+              <a:rPr sz="800" b="0">
+                <a:solidFill>
+                  <a:srgbClr val="FFFFFF"/>
+                </a:solidFill>
+                <a:latin typeface="Calibri"/>
+              </a:rPr>
+              <a:t>© 2026 Proxiant Academy | info@proxiant.com | proxiant.ai/training</a:t>
+            </a:r>
+          </a:p>
+        </p:txBody>
+      </p:sp>
     </p:spTree>
   </p:cSld>
   <p:clrMapOvr>
@@ -7801,6 +8501,41 @@
           </a:p>
         </p:txBody>
       </p:sp>
+      <p:sp>
+        <p:nvSpPr>
+          <p:cNvPr id="7" name="TextBox 6"/>
+          <p:cNvSpPr txBox="1"/>
+          <p:nvPr/>
+        </p:nvSpPr>
+        <p:spPr>
+          <a:xfrm>
+            <a:off x="457200" y="6620256"/>
+            <a:ext cx="11247120" cy="201168"/>
+          </a:xfrm>
+          <a:prstGeom prst="rect">
+            <a:avLst/>
+          </a:prstGeom>
+          <a:noFill/>
+        </p:spPr>
+        <p:txBody>
+          <a:bodyPr wrap="square">
+            <a:spAutoFit/>
+          </a:bodyPr>
+          <a:lstStyle/>
+          <a:p>
+            <a:pPr algn="ctr"/>
+            <a:r>
+              <a:rPr sz="800" b="0">
+                <a:solidFill>
+                  <a:srgbClr val="FFFFFF"/>
+                </a:solidFill>
+                <a:latin typeface="Calibri"/>
+              </a:rPr>
+              <a:t>© 2026 Proxiant Academy | info@proxiant.com | proxiant.ai/training</a:t>
+            </a:r>
+          </a:p>
+        </p:txBody>
+      </p:sp>
     </p:spTree>
   </p:cSld>
   <p:clrMapOvr>
@@ -7975,6 +8710,41 @@
           </a:p>
         </p:txBody>
       </p:sp>
+      <p:sp>
+        <p:nvSpPr>
+          <p:cNvPr id="6" name="TextBox 5"/>
+          <p:cNvSpPr txBox="1"/>
+          <p:nvPr/>
+        </p:nvSpPr>
+        <p:spPr>
+          <a:xfrm>
+            <a:off x="457200" y="6620256"/>
+            <a:ext cx="11247120" cy="201168"/>
+          </a:xfrm>
+          <a:prstGeom prst="rect">
+            <a:avLst/>
+          </a:prstGeom>
+          <a:noFill/>
+        </p:spPr>
+        <p:txBody>
+          <a:bodyPr wrap="square">
+            <a:spAutoFit/>
+          </a:bodyPr>
+          <a:lstStyle/>
+          <a:p>
+            <a:pPr algn="ctr"/>
+            <a:r>
+              <a:rPr sz="800" b="0">
+                <a:solidFill>
+                  <a:srgbClr val="1E2761"/>
+                </a:solidFill>
+                <a:latin typeface="Calibri"/>
+              </a:rPr>
+              <a:t>© 2026 Proxiant Academy | info@proxiant.com | proxiant.ai/training</a:t>
+            </a:r>
+          </a:p>
+        </p:txBody>
+      </p:sp>
     </p:spTree>
   </p:cSld>
   <p:clrMapOvr>
@@ -8188,6 +8958,41 @@
           </a:p>
         </p:txBody>
       </p:sp>
+      <p:sp>
+        <p:nvSpPr>
+          <p:cNvPr id="7" name="TextBox 6"/>
+          <p:cNvSpPr txBox="1"/>
+          <p:nvPr/>
+        </p:nvSpPr>
+        <p:spPr>
+          <a:xfrm>
+            <a:off x="457200" y="6620256"/>
+            <a:ext cx="11247120" cy="201168"/>
+          </a:xfrm>
+          <a:prstGeom prst="rect">
+            <a:avLst/>
+          </a:prstGeom>
+          <a:noFill/>
+        </p:spPr>
+        <p:txBody>
+          <a:bodyPr wrap="square">
+            <a:spAutoFit/>
+          </a:bodyPr>
+          <a:lstStyle/>
+          <a:p>
+            <a:pPr algn="ctr"/>
+            <a:r>
+              <a:rPr sz="800" b="0">
+                <a:solidFill>
+                  <a:srgbClr val="FFFFFF"/>
+                </a:solidFill>
+                <a:latin typeface="Calibri"/>
+              </a:rPr>
+              <a:t>© 2026 Proxiant Academy | info@proxiant.com | proxiant.ai/training</a:t>
+            </a:r>
+          </a:p>
+        </p:txBody>
+      </p:sp>
     </p:spTree>
   </p:cSld>
   <p:clrMapOvr>
@@ -8401,6 +9206,41 @@
           </a:p>
         </p:txBody>
       </p:sp>
+      <p:sp>
+        <p:nvSpPr>
+          <p:cNvPr id="7" name="TextBox 6"/>
+          <p:cNvSpPr txBox="1"/>
+          <p:nvPr/>
+        </p:nvSpPr>
+        <p:spPr>
+          <a:xfrm>
+            <a:off x="457200" y="6620256"/>
+            <a:ext cx="11247120" cy="201168"/>
+          </a:xfrm>
+          <a:prstGeom prst="rect">
+            <a:avLst/>
+          </a:prstGeom>
+          <a:noFill/>
+        </p:spPr>
+        <p:txBody>
+          <a:bodyPr wrap="square">
+            <a:spAutoFit/>
+          </a:bodyPr>
+          <a:lstStyle/>
+          <a:p>
+            <a:pPr algn="ctr"/>
+            <a:r>
+              <a:rPr sz="800" b="0">
+                <a:solidFill>
+                  <a:srgbClr val="FFFFFF"/>
+                </a:solidFill>
+                <a:latin typeface="Calibri"/>
+              </a:rPr>
+              <a:t>© 2026 Proxiant Academy | info@proxiant.com | proxiant.ai/training</a:t>
+            </a:r>
+          </a:p>
+        </p:txBody>
+      </p:sp>
     </p:spTree>
   </p:cSld>
   <p:clrMapOvr>
@@ -8614,6 +9454,41 @@
           </a:p>
         </p:txBody>
       </p:sp>
+      <p:sp>
+        <p:nvSpPr>
+          <p:cNvPr id="7" name="TextBox 6"/>
+          <p:cNvSpPr txBox="1"/>
+          <p:nvPr/>
+        </p:nvSpPr>
+        <p:spPr>
+          <a:xfrm>
+            <a:off x="457200" y="6620256"/>
+            <a:ext cx="11247120" cy="201168"/>
+          </a:xfrm>
+          <a:prstGeom prst="rect">
+            <a:avLst/>
+          </a:prstGeom>
+          <a:noFill/>
+        </p:spPr>
+        <p:txBody>
+          <a:bodyPr wrap="square">
+            <a:spAutoFit/>
+          </a:bodyPr>
+          <a:lstStyle/>
+          <a:p>
+            <a:pPr algn="ctr"/>
+            <a:r>
+              <a:rPr sz="800" b="0">
+                <a:solidFill>
+                  <a:srgbClr val="FFFFFF"/>
+                </a:solidFill>
+                <a:latin typeface="Calibri"/>
+              </a:rPr>
+              <a:t>© 2026 Proxiant Academy | info@proxiant.com | proxiant.ai/training</a:t>
+            </a:r>
+          </a:p>
+        </p:txBody>
+      </p:sp>
     </p:spTree>
   </p:cSld>
   <p:clrMapOvr>
@@ -8824,6 +9699,41 @@
           <a:lstStyle/>
           <a:p>
             <a:pPr algn="ctr"/>
+          </a:p>
+        </p:txBody>
+      </p:sp>
+      <p:sp>
+        <p:nvSpPr>
+          <p:cNvPr id="7" name="TextBox 6"/>
+          <p:cNvSpPr txBox="1"/>
+          <p:nvPr/>
+        </p:nvSpPr>
+        <p:spPr>
+          <a:xfrm>
+            <a:off x="457200" y="6620256"/>
+            <a:ext cx="11247120" cy="201168"/>
+          </a:xfrm>
+          <a:prstGeom prst="rect">
+            <a:avLst/>
+          </a:prstGeom>
+          <a:noFill/>
+        </p:spPr>
+        <p:txBody>
+          <a:bodyPr wrap="square">
+            <a:spAutoFit/>
+          </a:bodyPr>
+          <a:lstStyle/>
+          <a:p>
+            <a:pPr algn="ctr"/>
+            <a:r>
+              <a:rPr sz="800" b="0">
+                <a:solidFill>
+                  <a:srgbClr val="FFFFFF"/>
+                </a:solidFill>
+                <a:latin typeface="Calibri"/>
+              </a:rPr>
+              <a:t>© 2026 Proxiant Academy | info@proxiant.com | proxiant.ai/training</a:t>
+            </a:r>
           </a:p>
         </p:txBody>
       </p:sp>
